--- a/1. Data Structures/Data_Structures.pptx
+++ b/1. Data Structures/Data_Structures.pptx
@@ -13116,7 +13116,7 @@
                   <a:schemeClr val="accent3"/>
                 </a:solidFill>
               </a:rPr>
-              <a:t>lesson2.py</a:t>
+              <a:t>lesson1.py</a:t>
             </a:r>
           </a:p>
         </p:txBody>
@@ -13161,7 +13161,7 @@
                   <a:schemeClr val="accent3"/>
                 </a:solidFill>
               </a:rPr>
-              <a:t>lesson2.ipynb</a:t>
+              <a:t>lesson1.ipynb</a:t>
             </a:r>
             <a:endParaRPr sz="1400" dirty="0">
               <a:solidFill>
@@ -13471,13 +13471,13 @@
   <p:clrMapOvr>
     <a:masterClrMapping/>
   </p:clrMapOvr>
-  <mc:AlternateContent xmlns:mc="http://schemas.openxmlformats.org/markup-compatibility/2006">
-    <mc:Choice xmlns:p159="http://schemas.microsoft.com/office/powerpoint/2015/09/main" Requires="p159">
+  <mc:AlternateContent xmlns:mc="http://schemas.openxmlformats.org/markup-compatibility/2006" xmlns:p159="http://schemas.microsoft.com/office/powerpoint/2015/09/main">
+    <mc:Choice Requires="p159">
       <p:transition xmlns:p14="http://schemas.microsoft.com/office/powerpoint/2010/main" spd="slow" p14:dur="2000">
         <p159:morph option="byObject"/>
       </p:transition>
     </mc:Choice>
-    <mc:Fallback>
+    <mc:Fallback xmlns="">
       <p:transition spd="slow">
         <p:fade/>
       </p:transition>
@@ -15982,7 +15982,7 @@
                   <a:schemeClr val="accent3"/>
                 </a:solidFill>
               </a:rPr>
-              <a:t>lesson2.py</a:t>
+              <a:t>lesson1.py</a:t>
             </a:r>
             <a:endParaRPr sz="1400" dirty="0">
               <a:solidFill>
@@ -16032,7 +16032,7 @@
                   <a:schemeClr val="accent3"/>
                 </a:solidFill>
               </a:rPr>
-              <a:t>lesson2.ipynb</a:t>
+              <a:t>lesson1.ipynb</a:t>
             </a:r>
             <a:endParaRPr sz="1400" dirty="0">
               <a:solidFill>
@@ -17464,13 +17464,13 @@
   <p:clrMapOvr>
     <a:masterClrMapping/>
   </p:clrMapOvr>
-  <mc:AlternateContent xmlns:mc="http://schemas.openxmlformats.org/markup-compatibility/2006">
-    <mc:Choice xmlns:p159="http://schemas.microsoft.com/office/powerpoint/2015/09/main" Requires="p159">
+  <mc:AlternateContent xmlns:mc="http://schemas.openxmlformats.org/markup-compatibility/2006" xmlns:p159="http://schemas.microsoft.com/office/powerpoint/2015/09/main">
+    <mc:Choice Requires="p159">
       <p:transition xmlns:p14="http://schemas.microsoft.com/office/powerpoint/2010/main" spd="slow" p14:dur="2000">
         <p159:morph option="byObject"/>
       </p:transition>
     </mc:Choice>
-    <mc:Fallback>
+    <mc:Fallback xmlns="">
       <p:transition spd="slow">
         <p:fade/>
       </p:transition>
@@ -17850,7 +17850,7 @@
                   <a:schemeClr val="accent3"/>
                 </a:solidFill>
               </a:rPr>
-              <a:t>lesson2.py</a:t>
+              <a:t>lesson1.py</a:t>
             </a:r>
             <a:endParaRPr sz="1400" dirty="0">
               <a:solidFill>
@@ -17900,7 +17900,7 @@
                   <a:schemeClr val="accent3"/>
                 </a:solidFill>
               </a:rPr>
-              <a:t>lesson2.ipynb</a:t>
+              <a:t>lesson1.ipynb</a:t>
             </a:r>
             <a:endParaRPr sz="1400" dirty="0">
               <a:solidFill>
@@ -17915,13 +17915,13 @@
   <p:clrMapOvr>
     <a:masterClrMapping/>
   </p:clrMapOvr>
-  <mc:AlternateContent xmlns:mc="http://schemas.openxmlformats.org/markup-compatibility/2006">
-    <mc:Choice xmlns:p159="http://schemas.microsoft.com/office/powerpoint/2015/09/main" Requires="p159">
+  <mc:AlternateContent xmlns:mc="http://schemas.openxmlformats.org/markup-compatibility/2006" xmlns:p159="http://schemas.microsoft.com/office/powerpoint/2015/09/main">
+    <mc:Choice Requires="p159">
       <p:transition xmlns:p14="http://schemas.microsoft.com/office/powerpoint/2010/main" spd="slow" p14:dur="2000">
         <p159:morph option="byObject"/>
       </p:transition>
     </mc:Choice>
-    <mc:Fallback>
+    <mc:Fallback xmlns="">
       <p:transition spd="slow">
         <p:fade/>
       </p:transition>
@@ -18142,7 +18142,7 @@
                   <a:schemeClr val="accent3"/>
                 </a:solidFill>
               </a:rPr>
-              <a:t>lesson2.py</a:t>
+              <a:t>lesson1.py</a:t>
             </a:r>
             <a:endParaRPr sz="1400" dirty="0">
               <a:solidFill>
@@ -18198,7 +18198,7 @@
                   <a:schemeClr val="accent3"/>
                 </a:solidFill>
               </a:rPr>
-              <a:t>lesson2.ipynb</a:t>
+              <a:t>lesson1.ipynb</a:t>
             </a:r>
             <a:endParaRPr sz="1400" dirty="0">
               <a:solidFill>
@@ -18536,13 +18536,13 @@
   <p:clrMapOvr>
     <a:masterClrMapping/>
   </p:clrMapOvr>
-  <mc:AlternateContent xmlns:mc="http://schemas.openxmlformats.org/markup-compatibility/2006">
-    <mc:Choice xmlns:p159="http://schemas.microsoft.com/office/powerpoint/2015/09/main" Requires="p159">
+  <mc:AlternateContent xmlns:mc="http://schemas.openxmlformats.org/markup-compatibility/2006" xmlns:p159="http://schemas.microsoft.com/office/powerpoint/2015/09/main">
+    <mc:Choice Requires="p159">
       <p:transition xmlns:p14="http://schemas.microsoft.com/office/powerpoint/2010/main" spd="slow" p14:dur="2000">
         <p159:morph option="byObject"/>
       </p:transition>
     </mc:Choice>
-    <mc:Fallback>
+    <mc:Fallback xmlns="">
       <p:transition spd="slow">
         <p:fade/>
       </p:transition>
@@ -18763,7 +18763,7 @@
                   <a:schemeClr val="accent3"/>
                 </a:solidFill>
               </a:rPr>
-              <a:t>lesson2.py</a:t>
+              <a:t>lesson1.py</a:t>
             </a:r>
             <a:endParaRPr sz="1400" dirty="0">
               <a:solidFill>
@@ -18819,7 +18819,7 @@
                   <a:schemeClr val="accent3"/>
                 </a:solidFill>
               </a:rPr>
-              <a:t>lesson2.ipynb</a:t>
+              <a:t>lesson1.ipynb</a:t>
             </a:r>
             <a:endParaRPr sz="1400" dirty="0">
               <a:solidFill>
@@ -19180,13 +19180,13 @@
   <p:clrMapOvr>
     <a:masterClrMapping/>
   </p:clrMapOvr>
-  <mc:AlternateContent xmlns:mc="http://schemas.openxmlformats.org/markup-compatibility/2006">
-    <mc:Choice xmlns:p159="http://schemas.microsoft.com/office/powerpoint/2015/09/main" Requires="p159">
+  <mc:AlternateContent xmlns:mc="http://schemas.openxmlformats.org/markup-compatibility/2006" xmlns:p159="http://schemas.microsoft.com/office/powerpoint/2015/09/main">
+    <mc:Choice Requires="p159">
       <p:transition xmlns:p14="http://schemas.microsoft.com/office/powerpoint/2010/main" spd="slow" p14:dur="2000">
         <p159:morph option="byObject"/>
       </p:transition>
     </mc:Choice>
-    <mc:Fallback>
+    <mc:Fallback xmlns="">
       <p:transition spd="slow">
         <p:fade/>
       </p:transition>
@@ -19407,7 +19407,7 @@
                   <a:schemeClr val="accent3"/>
                 </a:solidFill>
               </a:rPr>
-              <a:t>lesson2.py</a:t>
+              <a:t>lesson1.py</a:t>
             </a:r>
             <a:endParaRPr sz="1400" dirty="0">
               <a:solidFill>
@@ -19463,7 +19463,7 @@
                   <a:schemeClr val="accent3"/>
                 </a:solidFill>
               </a:rPr>
-              <a:t>lesson2.ipynb</a:t>
+              <a:t>lesson1.ipynb</a:t>
             </a:r>
             <a:endParaRPr sz="1400" dirty="0">
               <a:solidFill>
@@ -19742,13 +19742,13 @@
   <p:clrMapOvr>
     <a:masterClrMapping/>
   </p:clrMapOvr>
-  <mc:AlternateContent xmlns:mc="http://schemas.openxmlformats.org/markup-compatibility/2006">
-    <mc:Choice xmlns:p159="http://schemas.microsoft.com/office/powerpoint/2015/09/main" Requires="p159">
+  <mc:AlternateContent xmlns:mc="http://schemas.openxmlformats.org/markup-compatibility/2006" xmlns:p159="http://schemas.microsoft.com/office/powerpoint/2015/09/main">
+    <mc:Choice Requires="p159">
       <p:transition xmlns:p14="http://schemas.microsoft.com/office/powerpoint/2010/main" spd="slow" p14:dur="2000">
         <p159:morph option="byObject"/>
       </p:transition>
     </mc:Choice>
-    <mc:Fallback>
+    <mc:Fallback xmlns="">
       <p:transition spd="slow">
         <p:fade/>
       </p:transition>
@@ -19969,7 +19969,7 @@
                   <a:schemeClr val="accent3"/>
                 </a:solidFill>
               </a:rPr>
-              <a:t>lesson2.py</a:t>
+              <a:t>lesson1.py</a:t>
             </a:r>
             <a:endParaRPr sz="1400" dirty="0">
               <a:solidFill>
@@ -20025,7 +20025,7 @@
                   <a:schemeClr val="accent3"/>
                 </a:solidFill>
               </a:rPr>
-              <a:t>lesson2.ipynb</a:t>
+              <a:t>lesson1.ipynb</a:t>
             </a:r>
             <a:endParaRPr sz="1400" dirty="0">
               <a:solidFill>
@@ -20561,13 +20561,13 @@
   <p:clrMapOvr>
     <a:masterClrMapping/>
   </p:clrMapOvr>
-  <mc:AlternateContent xmlns:mc="http://schemas.openxmlformats.org/markup-compatibility/2006">
-    <mc:Choice xmlns:p159="http://schemas.microsoft.com/office/powerpoint/2015/09/main" Requires="p159">
+  <mc:AlternateContent xmlns:mc="http://schemas.openxmlformats.org/markup-compatibility/2006" xmlns:p159="http://schemas.microsoft.com/office/powerpoint/2015/09/main">
+    <mc:Choice Requires="p159">
       <p:transition xmlns:p14="http://schemas.microsoft.com/office/powerpoint/2010/main" spd="slow" p14:dur="2000">
         <p159:morph option="byObject"/>
       </p:transition>
     </mc:Choice>
-    <mc:Fallback>
+    <mc:Fallback xmlns="">
       <p:transition spd="slow">
         <p:fade/>
       </p:transition>
@@ -21242,13 +21242,13 @@
   <p:clrMapOvr>
     <a:masterClrMapping/>
   </p:clrMapOvr>
-  <mc:AlternateContent xmlns:mc="http://schemas.openxmlformats.org/markup-compatibility/2006">
-    <mc:Choice xmlns:p159="http://schemas.microsoft.com/office/powerpoint/2015/09/main" Requires="p159">
+  <mc:AlternateContent xmlns:mc="http://schemas.openxmlformats.org/markup-compatibility/2006" xmlns:p159="http://schemas.microsoft.com/office/powerpoint/2015/09/main">
+    <mc:Choice Requires="p159">
       <p:transition xmlns:p14="http://schemas.microsoft.com/office/powerpoint/2010/main" spd="slow" p14:dur="2000">
         <p159:morph option="byObject"/>
       </p:transition>
     </mc:Choice>
-    <mc:Fallback>
+    <mc:Fallback xmlns="">
       <p:transition spd="slow">
         <p:fade/>
       </p:transition>
@@ -21309,13 +21309,13 @@
   <p:clrMapOvr>
     <a:masterClrMapping/>
   </p:clrMapOvr>
-  <mc:AlternateContent xmlns:mc="http://schemas.openxmlformats.org/markup-compatibility/2006">
-    <mc:Choice xmlns:p159="http://schemas.microsoft.com/office/powerpoint/2015/09/main" Requires="p159">
+  <mc:AlternateContent xmlns:mc="http://schemas.openxmlformats.org/markup-compatibility/2006" xmlns:p159="http://schemas.microsoft.com/office/powerpoint/2015/09/main">
+    <mc:Choice Requires="p159">
       <p:transition xmlns:p14="http://schemas.microsoft.com/office/powerpoint/2010/main" spd="slow" p14:dur="2000">
         <p159:morph option="byObject"/>
       </p:transition>
     </mc:Choice>
-    <mc:Fallback>
+    <mc:Fallback xmlns="">
       <p:transition spd="slow">
         <p:fade/>
       </p:transition>
@@ -22168,6 +22168,15 @@
 </file>
 
 <file path=customXml/item1.xml><?xml version="1.0" encoding="utf-8"?>
+<?mso-contentType ?>
+<FormTemplates xmlns="http://schemas.microsoft.com/sharepoint/v3/contenttype/forms">
+  <Display>DocumentLibraryForm</Display>
+  <Edit>DocumentLibraryForm</Edit>
+  <New>DocumentLibraryForm</New>
+</FormTemplates>
+</file>
+
+<file path=customXml/item2.xml><?xml version="1.0" encoding="utf-8"?>
 <ct:contentTypeSchema xmlns:ct="http://schemas.microsoft.com/office/2006/metadata/contentType" xmlns:ma="http://schemas.microsoft.com/office/2006/metadata/properties/metaAttributes" ct:_="" ma:_="" ma:contentTypeName="Documento" ma:contentTypeID="0x0101005B65209DBFF0BD4CA334E984111739BD" ma:contentTypeVersion="18" ma:contentTypeDescription="Criar um novo documento." ma:contentTypeScope="" ma:versionID="58ab01216903763b651f1645b3b88d73">
   <xsd:schema xmlns:xsd="http://www.w3.org/2001/XMLSchema" xmlns:xs="http://www.w3.org/2001/XMLSchema" xmlns:p="http://schemas.microsoft.com/office/2006/metadata/properties" xmlns:ns3="e5320658-45b1-444d-b7a9-3efd9c437958" xmlns:ns4="3f59f02c-74f8-4e70-b149-5783d454d21b" targetNamespace="http://schemas.microsoft.com/office/2006/metadata/properties" ma:root="true" ma:fieldsID="095824ff48cee5bb69c36370f5aa33c7" ns3:_="" ns4:_="">
     <xsd:import namespace="e5320658-45b1-444d-b7a9-3efd9c437958"/>
@@ -22420,15 +22429,6 @@
 </ct:contentTypeSchema>
 </file>
 
-<file path=customXml/item2.xml><?xml version="1.0" encoding="utf-8"?>
-<?mso-contentType ?>
-<FormTemplates xmlns="http://schemas.microsoft.com/sharepoint/v3/contenttype/forms">
-  <Display>DocumentLibraryForm</Display>
-  <Edit>DocumentLibraryForm</Edit>
-  <New>DocumentLibraryForm</New>
-</FormTemplates>
-</file>
-
 <file path=customXml/item3.xml><?xml version="1.0" encoding="utf-8"?>
 <p:properties xmlns:p="http://schemas.microsoft.com/office/2006/metadata/properties" xmlns:xsi="http://www.w3.org/2001/XMLSchema-instance" xmlns:pc="http://schemas.microsoft.com/office/infopath/2007/PartnerControls">
   <documentManagement>
@@ -22438,6 +22438,14 @@
 </file>
 
 <file path=customXml/itemProps1.xml><?xml version="1.0" encoding="utf-8"?>
+<ds:datastoreItem xmlns:ds="http://schemas.openxmlformats.org/officeDocument/2006/customXml" ds:itemID="{0BF96409-10EE-4E1A-B70C-9E7CDBF15CF1}">
+  <ds:schemaRefs>
+    <ds:schemaRef ds:uri="http://schemas.microsoft.com/sharepoint/v3/contenttype/forms"/>
+  </ds:schemaRefs>
+</ds:datastoreItem>
+</file>
+
+<file path=customXml/itemProps2.xml><?xml version="1.0" encoding="utf-8"?>
 <ds:datastoreItem xmlns:ds="http://schemas.openxmlformats.org/officeDocument/2006/customXml" ds:itemID="{76485B3A-E43F-4C5D-B96C-118FAEF3ADFC}">
   <ds:schemaRefs>
     <ds:schemaRef ds:uri="http://schemas.microsoft.com/office/2006/metadata/contentType"/>
@@ -22452,14 +22460,6 @@
     <ds:schemaRef ds:uri="http://purl.org/dc/elements/1.1/"/>
     <ds:schemaRef ds:uri="http://purl.org/dc/terms/"/>
     <ds:schemaRef ds:uri="http://schemas.microsoft.com/internal/obd"/>
-  </ds:schemaRefs>
-</ds:datastoreItem>
-</file>
-
-<file path=customXml/itemProps2.xml><?xml version="1.0" encoding="utf-8"?>
-<ds:datastoreItem xmlns:ds="http://schemas.openxmlformats.org/officeDocument/2006/customXml" ds:itemID="{0BF96409-10EE-4E1A-B70C-9E7CDBF15CF1}">
-  <ds:schemaRefs>
-    <ds:schemaRef ds:uri="http://schemas.microsoft.com/sharepoint/v3/contenttype/forms"/>
   </ds:schemaRefs>
 </ds:datastoreItem>
 </file>
